--- a/class/cloud_infra_mgmt/13주차_통합실습1/01_강의자료/1차시_파이프라인아키텍처설계.pptx
+++ b/class/cloud_infra_mgmt/13주차_통합실습1/01_강의자료/1차시_파이프라인아키텍처설계.pptx
@@ -9089,7 +9089,7 @@
               </a:lnSpc>
             </a:pPr>
             <a:r>
-              <a:rPr sz="1500" b="1">
+              <a:rPr sz="1700" b="1">
                 <a:solidFill>
                   <a:srgbClr val="0D9488"/>
                 </a:solidFill>
@@ -9098,7 +9098,7 @@
               <a:t>●  </a:t>
             </a:r>
             <a:r>
-              <a:rPr sz="1500" b="0">
+              <a:rPr sz="1700" b="0">
                 <a:solidFill>
                   <a:srgbClr val="222733"/>
                 </a:solidFill>
@@ -9114,7 +9114,7 @@
               </a:lnSpc>
             </a:pPr>
             <a:r>
-              <a:rPr sz="1500" b="1">
+              <a:rPr sz="1700" b="1">
                 <a:solidFill>
                   <a:srgbClr val="0D9488"/>
                 </a:solidFill>
@@ -9123,7 +9123,7 @@
               <a:t>●  </a:t>
             </a:r>
             <a:r>
-              <a:rPr sz="1500" b="0">
+              <a:rPr sz="1700" b="0">
                 <a:solidFill>
                   <a:srgbClr val="222733"/>
                 </a:solidFill>
@@ -9139,7 +9139,7 @@
               </a:lnSpc>
             </a:pPr>
             <a:r>
-              <a:rPr sz="1500" b="1">
+              <a:rPr sz="1700" b="1">
                 <a:solidFill>
                   <a:srgbClr val="0D9488"/>
                 </a:solidFill>
@@ -9148,7 +9148,7 @@
               <a:t>●  </a:t>
             </a:r>
             <a:r>
-              <a:rPr sz="1500" b="0">
+              <a:rPr sz="1700" b="0">
                 <a:solidFill>
                   <a:srgbClr val="222733"/>
                 </a:solidFill>
@@ -9164,7 +9164,7 @@
               </a:lnSpc>
             </a:pPr>
             <a:r>
-              <a:rPr sz="1500" b="1">
+              <a:rPr sz="1700" b="1">
                 <a:solidFill>
                   <a:srgbClr val="0D9488"/>
                 </a:solidFill>
@@ -9173,7 +9173,7 @@
               <a:t>●  </a:t>
             </a:r>
             <a:r>
-              <a:rPr sz="1500" b="0">
+              <a:rPr sz="1700" b="0">
                 <a:solidFill>
                   <a:srgbClr val="222733"/>
                 </a:solidFill>

--- a/class/cloud_infra_mgmt/13주차_통합실습1/01_강의자료/1차시_파이프라인아키텍처설계.pptx
+++ b/class/cloud_infra_mgmt/13주차_통합실습1/01_강의자료/1차시_파이프라인아키텍처설계.pptx
@@ -5232,7 +5232,7 @@
           <a:p>
             <a:pPr>
               <a:lnSpc>
-                <a:spcPct val="115000"/>
+                <a:spcPct val="149500"/>
               </a:lnSpc>
             </a:pPr>
             <a:r>
@@ -5257,7 +5257,7 @@
           <a:p>
             <a:pPr>
               <a:lnSpc>
-                <a:spcPct val="115000"/>
+                <a:spcPct val="149500"/>
               </a:lnSpc>
             </a:pPr>
             <a:r>
@@ -5282,7 +5282,7 @@
           <a:p>
             <a:pPr>
               <a:lnSpc>
-                <a:spcPct val="115000"/>
+                <a:spcPct val="149500"/>
               </a:lnSpc>
             </a:pPr>
             <a:r>
@@ -5673,7 +5673,7 @@
           <a:p>
             <a:pPr>
               <a:lnSpc>
-                <a:spcPct val="115000"/>
+                <a:spcPct val="149500"/>
               </a:lnSpc>
             </a:pPr>
             <a:r>
@@ -5698,7 +5698,7 @@
           <a:p>
             <a:pPr>
               <a:lnSpc>
-                <a:spcPct val="115000"/>
+                <a:spcPct val="149500"/>
               </a:lnSpc>
             </a:pPr>
             <a:r>
@@ -5723,7 +5723,7 @@
           <a:p>
             <a:pPr>
               <a:lnSpc>
-                <a:spcPct val="115000"/>
+                <a:spcPct val="149500"/>
               </a:lnSpc>
             </a:pPr>
             <a:r>
@@ -6972,16 +6972,60 @@
       </p:sp>
       <p:sp>
         <p:nvSpPr>
-          <p:cNvPr id="7" name="Isosceles Triangle 6"/>
+          <p:cNvPr id="7" name="Rectangle 6"/>
           <p:cNvSpPr/>
           <p:nvPr/>
         </p:nvSpPr>
         <p:spPr>
-          <a:xfrm rot="5400000">
-            <a:off x="4423409" y="1673352"/>
-            <a:ext cx="146304" cy="146304"/>
-          </a:xfrm>
-          <a:prstGeom prst="triangle">
+          <a:xfrm>
+            <a:off x="6359651" y="1730959"/>
+            <a:ext cx="2665476" cy="31089"/>
+          </a:xfrm>
+          <a:prstGeom prst="rect">
+            <a:avLst/>
+          </a:prstGeom>
+          <a:solidFill>
+            <a:srgbClr val="14B8A6"/>
+          </a:solidFill>
+          <a:ln>
+            <a:noFill/>
+          </a:ln>
+          <a:effectLst/>
+        </p:spPr>
+        <p:style>
+          <a:lnRef idx="1">
+            <a:schemeClr val="accent1"/>
+          </a:lnRef>
+          <a:fillRef idx="3">
+            <a:schemeClr val="accent1"/>
+          </a:fillRef>
+          <a:effectRef idx="2">
+            <a:schemeClr val="accent1"/>
+          </a:effectRef>
+          <a:fontRef idx="minor">
+            <a:schemeClr val="lt1"/>
+          </a:fontRef>
+        </p:style>
+        <p:txBody>
+          <a:bodyPr rtlCol="0" anchor="ctr"/>
+          <a:lstStyle/>
+          <a:p>
+            <a:pPr algn="ctr"/>
+          </a:p>
+        </p:txBody>
+      </p:sp>
+      <p:sp>
+        <p:nvSpPr>
+          <p:cNvPr id="8" name="Oval 7"/>
+          <p:cNvSpPr/>
+          <p:nvPr/>
+        </p:nvSpPr>
+        <p:spPr>
+          <a:xfrm>
+            <a:off x="2633472" y="1481328"/>
+            <a:ext cx="530352" cy="530352"/>
+          </a:xfrm>
+          <a:prstGeom prst="ellipse">
             <a:avLst/>
           </a:prstGeom>
           <a:solidFill>
@@ -7016,139 +7060,7 @@
       </p:sp>
       <p:sp>
         <p:nvSpPr>
-          <p:cNvPr id="8" name="Rectangle 7"/>
-          <p:cNvSpPr/>
-          <p:nvPr/>
-        </p:nvSpPr>
-        <p:spPr>
-          <a:xfrm>
-            <a:off x="6359651" y="1730959"/>
-            <a:ext cx="2665476" cy="31089"/>
-          </a:xfrm>
-          <a:prstGeom prst="rect">
-            <a:avLst/>
-          </a:prstGeom>
-          <a:solidFill>
-            <a:srgbClr val="14B8A6"/>
-          </a:solidFill>
-          <a:ln>
-            <a:noFill/>
-          </a:ln>
-          <a:effectLst/>
-        </p:spPr>
-        <p:style>
-          <a:lnRef idx="1">
-            <a:schemeClr val="accent1"/>
-          </a:lnRef>
-          <a:fillRef idx="3">
-            <a:schemeClr val="accent1"/>
-          </a:fillRef>
-          <a:effectRef idx="2">
-            <a:schemeClr val="accent1"/>
-          </a:effectRef>
-          <a:fontRef idx="minor">
-            <a:schemeClr val="lt1"/>
-          </a:fontRef>
-        </p:style>
-        <p:txBody>
-          <a:bodyPr rtlCol="0" anchor="ctr"/>
-          <a:lstStyle/>
-          <a:p>
-            <a:pPr algn="ctr"/>
-          </a:p>
-        </p:txBody>
-      </p:sp>
-      <p:sp>
-        <p:nvSpPr>
-          <p:cNvPr id="9" name="Isosceles Triangle 8"/>
-          <p:cNvSpPr/>
-          <p:nvPr/>
-        </p:nvSpPr>
-        <p:spPr>
-          <a:xfrm rot="5400000">
-            <a:off x="7619238" y="1673352"/>
-            <a:ext cx="146304" cy="146304"/>
-          </a:xfrm>
-          <a:prstGeom prst="triangle">
-            <a:avLst/>
-          </a:prstGeom>
-          <a:solidFill>
-            <a:srgbClr val="0D9488"/>
-          </a:solidFill>
-          <a:ln>
-            <a:noFill/>
-          </a:ln>
-          <a:effectLst/>
-        </p:spPr>
-        <p:style>
-          <a:lnRef idx="1">
-            <a:schemeClr val="accent1"/>
-          </a:lnRef>
-          <a:fillRef idx="3">
-            <a:schemeClr val="accent1"/>
-          </a:fillRef>
-          <a:effectRef idx="2">
-            <a:schemeClr val="accent1"/>
-          </a:effectRef>
-          <a:fontRef idx="minor">
-            <a:schemeClr val="lt1"/>
-          </a:fontRef>
-        </p:style>
-        <p:txBody>
-          <a:bodyPr rtlCol="0" anchor="ctr"/>
-          <a:lstStyle/>
-          <a:p>
-            <a:pPr algn="ctr"/>
-          </a:p>
-        </p:txBody>
-      </p:sp>
-      <p:sp>
-        <p:nvSpPr>
-          <p:cNvPr id="10" name="Oval 9"/>
-          <p:cNvSpPr/>
-          <p:nvPr/>
-        </p:nvSpPr>
-        <p:spPr>
-          <a:xfrm>
-            <a:off x="2633472" y="1481328"/>
-            <a:ext cx="530352" cy="530352"/>
-          </a:xfrm>
-          <a:prstGeom prst="ellipse">
-            <a:avLst/>
-          </a:prstGeom>
-          <a:solidFill>
-            <a:srgbClr val="0D9488"/>
-          </a:solidFill>
-          <a:ln>
-            <a:noFill/>
-          </a:ln>
-          <a:effectLst/>
-        </p:spPr>
-        <p:style>
-          <a:lnRef idx="1">
-            <a:schemeClr val="accent1"/>
-          </a:lnRef>
-          <a:fillRef idx="3">
-            <a:schemeClr val="accent1"/>
-          </a:fillRef>
-          <a:effectRef idx="2">
-            <a:schemeClr val="accent1"/>
-          </a:effectRef>
-          <a:fontRef idx="minor">
-            <a:schemeClr val="lt1"/>
-          </a:fontRef>
-        </p:style>
-        <p:txBody>
-          <a:bodyPr rtlCol="0" anchor="ctr"/>
-          <a:lstStyle/>
-          <a:p>
-            <a:pPr algn="ctr"/>
-          </a:p>
-        </p:txBody>
-      </p:sp>
-      <p:sp>
-        <p:nvSpPr>
-          <p:cNvPr id="11" name="TextBox 10"/>
+          <p:cNvPr id="9" name="TextBox 8"/>
           <p:cNvSpPr txBox="1"/>
           <p:nvPr/>
         </p:nvSpPr>
@@ -7183,7 +7095,7 @@
       </p:sp>
       <p:sp>
         <p:nvSpPr>
-          <p:cNvPr id="12" name="Rounded Rectangle 11"/>
+          <p:cNvPr id="10" name="Rounded Rectangle 9"/>
           <p:cNvSpPr/>
           <p:nvPr/>
         </p:nvSpPr>
@@ -7231,7 +7143,7 @@
       </p:sp>
       <p:sp>
         <p:nvSpPr>
-          <p:cNvPr id="13" name="TextBox 12"/>
+          <p:cNvPr id="11" name="TextBox 10"/>
           <p:cNvSpPr txBox="1"/>
           <p:nvPr/>
         </p:nvSpPr>
@@ -7266,7 +7178,7 @@
       </p:sp>
       <p:sp>
         <p:nvSpPr>
-          <p:cNvPr id="14" name="TextBox 13"/>
+          <p:cNvPr id="12" name="TextBox 11"/>
           <p:cNvSpPr txBox="1"/>
           <p:nvPr/>
         </p:nvSpPr>
@@ -7305,7 +7217,7 @@
       </p:sp>
       <p:sp>
         <p:nvSpPr>
-          <p:cNvPr id="15" name="Oval 14"/>
+          <p:cNvPr id="13" name="Oval 12"/>
           <p:cNvSpPr/>
           <p:nvPr/>
         </p:nvSpPr>
@@ -7349,7 +7261,7 @@
       </p:sp>
       <p:sp>
         <p:nvSpPr>
-          <p:cNvPr id="16" name="TextBox 15"/>
+          <p:cNvPr id="14" name="TextBox 13"/>
           <p:cNvSpPr txBox="1"/>
           <p:nvPr/>
         </p:nvSpPr>
@@ -7384,7 +7296,7 @@
       </p:sp>
       <p:sp>
         <p:nvSpPr>
-          <p:cNvPr id="17" name="Rounded Rectangle 16"/>
+          <p:cNvPr id="15" name="Rounded Rectangle 14"/>
           <p:cNvSpPr/>
           <p:nvPr/>
         </p:nvSpPr>
@@ -7432,7 +7344,7 @@
       </p:sp>
       <p:sp>
         <p:nvSpPr>
-          <p:cNvPr id="18" name="TextBox 17"/>
+          <p:cNvPr id="16" name="TextBox 15"/>
           <p:cNvSpPr txBox="1"/>
           <p:nvPr/>
         </p:nvSpPr>
@@ -7467,7 +7379,7 @@
       </p:sp>
       <p:sp>
         <p:nvSpPr>
-          <p:cNvPr id="19" name="TextBox 18"/>
+          <p:cNvPr id="17" name="TextBox 16"/>
           <p:cNvSpPr txBox="1"/>
           <p:nvPr/>
         </p:nvSpPr>
@@ -7506,7 +7418,7 @@
       </p:sp>
       <p:sp>
         <p:nvSpPr>
-          <p:cNvPr id="20" name="Oval 19"/>
+          <p:cNvPr id="18" name="Oval 17"/>
           <p:cNvSpPr/>
           <p:nvPr/>
         </p:nvSpPr>
@@ -7550,7 +7462,7 @@
       </p:sp>
       <p:sp>
         <p:nvSpPr>
-          <p:cNvPr id="21" name="TextBox 20"/>
+          <p:cNvPr id="19" name="TextBox 18"/>
           <p:cNvSpPr txBox="1"/>
           <p:nvPr/>
         </p:nvSpPr>
@@ -7585,7 +7497,7 @@
       </p:sp>
       <p:sp>
         <p:nvSpPr>
-          <p:cNvPr id="22" name="Rounded Rectangle 21"/>
+          <p:cNvPr id="20" name="Rounded Rectangle 19"/>
           <p:cNvSpPr/>
           <p:nvPr/>
         </p:nvSpPr>
@@ -7633,7 +7545,7 @@
       </p:sp>
       <p:sp>
         <p:nvSpPr>
-          <p:cNvPr id="23" name="TextBox 22"/>
+          <p:cNvPr id="21" name="TextBox 20"/>
           <p:cNvSpPr txBox="1"/>
           <p:nvPr/>
         </p:nvSpPr>
@@ -7668,7 +7580,7 @@
       </p:sp>
       <p:sp>
         <p:nvSpPr>
-          <p:cNvPr id="24" name="TextBox 23"/>
+          <p:cNvPr id="22" name="TextBox 21"/>
           <p:cNvSpPr txBox="1"/>
           <p:nvPr/>
         </p:nvSpPr>
@@ -7707,7 +7619,7 @@
       </p:sp>
       <p:sp>
         <p:nvSpPr>
-          <p:cNvPr id="25" name="TextBox 24"/>
+          <p:cNvPr id="23" name="TextBox 22"/>
           <p:cNvSpPr txBox="1"/>
           <p:nvPr/>
         </p:nvSpPr>
@@ -7742,7 +7654,7 @@
       </p:sp>
       <p:sp>
         <p:nvSpPr>
-          <p:cNvPr id="26" name="TextBox 25"/>
+          <p:cNvPr id="24" name="TextBox 23"/>
           <p:cNvSpPr txBox="1"/>
           <p:nvPr/>
         </p:nvSpPr>
@@ -7777,7 +7689,7 @@
       </p:sp>
       <p:sp>
         <p:nvSpPr>
-          <p:cNvPr id="27" name="Rectangle 26"/>
+          <p:cNvPr id="25" name="Rectangle 24"/>
           <p:cNvSpPr/>
           <p:nvPr/>
         </p:nvSpPr>
@@ -8301,7 +8213,7 @@
           <a:p>
             <a:pPr>
               <a:lnSpc>
-                <a:spcPct val="115000"/>
+                <a:spcPct val="149500"/>
               </a:lnSpc>
             </a:pPr>
             <a:r>
@@ -8326,7 +8238,7 @@
           <a:p>
             <a:pPr>
               <a:lnSpc>
-                <a:spcPct val="115000"/>
+                <a:spcPct val="149500"/>
               </a:lnSpc>
             </a:pPr>
             <a:r>
@@ -8351,7 +8263,7 @@
           <a:p>
             <a:pPr>
               <a:lnSpc>
-                <a:spcPct val="115000"/>
+                <a:spcPct val="149500"/>
               </a:lnSpc>
             </a:pPr>
             <a:r>
@@ -9085,7 +8997,7 @@
           <a:p>
             <a:pPr>
               <a:lnSpc>
-                <a:spcPct val="115000"/>
+                <a:spcPct val="149500"/>
               </a:lnSpc>
             </a:pPr>
             <a:r>
@@ -9110,7 +9022,7 @@
           <a:p>
             <a:pPr>
               <a:lnSpc>
-                <a:spcPct val="115000"/>
+                <a:spcPct val="149500"/>
               </a:lnSpc>
             </a:pPr>
             <a:r>
@@ -9135,7 +9047,7 @@
           <a:p>
             <a:pPr>
               <a:lnSpc>
-                <a:spcPct val="115000"/>
+                <a:spcPct val="149500"/>
               </a:lnSpc>
             </a:pPr>
             <a:r>
@@ -9160,7 +9072,7 @@
           <a:p>
             <a:pPr>
               <a:lnSpc>
-                <a:spcPct val="115000"/>
+                <a:spcPct val="149500"/>
               </a:lnSpc>
             </a:pPr>
             <a:r>
@@ -9902,7 +9814,7 @@
           <a:p>
             <a:pPr>
               <a:lnSpc>
-                <a:spcPct val="115000"/>
+                <a:spcPct val="149500"/>
               </a:lnSpc>
             </a:pPr>
             <a:r>
@@ -9927,7 +9839,7 @@
           <a:p>
             <a:pPr>
               <a:lnSpc>
-                <a:spcPct val="115000"/>
+                <a:spcPct val="149500"/>
               </a:lnSpc>
             </a:pPr>
             <a:r>
@@ -9952,7 +9864,7 @@
           <a:p>
             <a:pPr>
               <a:lnSpc>
-                <a:spcPct val="115000"/>
+                <a:spcPct val="149500"/>
               </a:lnSpc>
             </a:pPr>
             <a:r>
@@ -9977,7 +9889,7 @@
           <a:p>
             <a:pPr>
               <a:lnSpc>
-                <a:spcPct val="115000"/>
+                <a:spcPct val="149500"/>
               </a:lnSpc>
             </a:pPr>
             <a:r>
@@ -10368,7 +10280,7 @@
           <a:p>
             <a:pPr>
               <a:lnSpc>
-                <a:spcPct val="115000"/>
+                <a:spcPct val="149500"/>
               </a:lnSpc>
             </a:pPr>
             <a:r>
@@ -10393,7 +10305,7 @@
           <a:p>
             <a:pPr>
               <a:lnSpc>
-                <a:spcPct val="115000"/>
+                <a:spcPct val="149500"/>
               </a:lnSpc>
             </a:pPr>
             <a:r>
@@ -10418,7 +10330,7 @@
           <a:p>
             <a:pPr>
               <a:lnSpc>
-                <a:spcPct val="115000"/>
+                <a:spcPct val="149500"/>
               </a:lnSpc>
             </a:pPr>
             <a:r>

--- a/class/cloud_infra_mgmt/13주차_통합실습1/01_강의자료/1차시_파이프라인아키텍처설계.pptx
+++ b/class/cloud_infra_mgmt/13주차_통합실습1/01_강의자료/1차시_파이프라인아키텍처설계.pptx
@@ -4868,6 +4868,8 @@
                   <a:srgbClr val="14B8A6"/>
                 </a:solidFill>
                 <a:latin typeface="맑은 고딕"/>
+                <a:ea typeface="맑은 고딕"/>
+                <a:cs typeface="맑은 고딕"/>
               </a:rPr>
               <a:t>클라우드인프라관리  ·  13주차 1차시 [VM 전용]</a:t>
             </a:r>
@@ -4903,6 +4905,8 @@
                   <a:srgbClr val="FFFFFF"/>
                 </a:solidFill>
                 <a:latin typeface="맑은 고딕"/>
+                <a:ea typeface="맑은 고딕"/>
+                <a:cs typeface="맑은 고딕"/>
               </a:rPr>
               <a:t>파이프라인 아키텍처 설계</a:t>
             </a:r>
@@ -4938,6 +4942,8 @@
                   <a:srgbClr val="C9D3E6"/>
                 </a:solidFill>
                 <a:latin typeface="맑은 고딕"/>
+                <a:ea typeface="맑은 고딕"/>
+                <a:cs typeface="맑은 고딕"/>
               </a:rPr>
               <a:t>AI 미니 챗봇 자동 배포, 전체 그림 그려보기</a:t>
             </a:r>
@@ -4973,6 +4979,8 @@
                   <a:srgbClr val="FFFFFF"/>
                 </a:solidFill>
                 <a:latin typeface="맑은 고딕"/>
+                <a:ea typeface="맑은 고딕"/>
+                <a:cs typeface="맑은 고딕"/>
               </a:rPr>
               <a:t>영남이공대학교 김지윤교수</a:t>
             </a:r>
@@ -5132,6 +5140,8 @@
                   <a:srgbClr val="14213D"/>
                 </a:solidFill>
                 <a:latin typeface="맑은 고딕"/>
+                <a:ea typeface="맑은 고딕"/>
+                <a:cs typeface="맑은 고딕"/>
               </a:rPr>
               <a:t>02</a:t>
             </a:r>
@@ -5167,6 +5177,8 @@
                   <a:srgbClr val="14B8A6"/>
                 </a:solidFill>
                 <a:latin typeface="맑은 고딕"/>
+                <a:ea typeface="맑은 고딕"/>
+                <a:cs typeface="맑은 고딕"/>
               </a:rPr>
               <a:t>실습 안내</a:t>
             </a:r>
@@ -5202,6 +5214,8 @@
                   <a:srgbClr val="FFFFFF"/>
                 </a:solidFill>
                 <a:latin typeface="맑은 고딕"/>
+                <a:ea typeface="맑은 고딕"/>
+                <a:cs typeface="맑은 고딕"/>
               </a:rPr>
               <a:t>VM 실습 — 챗봇 코드 확인 + 흐름도 그리기</a:t>
             </a:r>
@@ -5241,6 +5255,8 @@
                   <a:srgbClr val="0D9488"/>
                 </a:solidFill>
                 <a:latin typeface="맑은 고딕"/>
+                <a:ea typeface="맑은 고딕"/>
+                <a:cs typeface="맑은 고딕"/>
               </a:rPr>
               <a:t>●  </a:t>
             </a:r>
@@ -5250,6 +5266,8 @@
                   <a:srgbClr val="222733"/>
                 </a:solidFill>
                 <a:latin typeface="맑은 고딕"/>
+                <a:ea typeface="맑은 고딕"/>
+                <a:cs typeface="맑은 고딕"/>
               </a:rPr>
               <a:t>04_템플릿코드의 챗봇 뼈대 코드를 VM에 내려받아 구조 파악(app.py, Dockerfile, deployment.yaml)</a:t>
             </a:r>
@@ -5266,6 +5284,8 @@
                   <a:srgbClr val="0D9488"/>
                 </a:solidFill>
                 <a:latin typeface="맑은 고딕"/>
+                <a:ea typeface="맑은 고딕"/>
+                <a:cs typeface="맑은 고딕"/>
               </a:rPr>
               <a:t>●  </a:t>
             </a:r>
@@ -5275,6 +5295,8 @@
                   <a:srgbClr val="222733"/>
                 </a:solidFill>
                 <a:latin typeface="맑은 고딕"/>
+                <a:ea typeface="맑은 고딕"/>
+                <a:cs typeface="맑은 고딕"/>
               </a:rPr>
               <a:t>종이나 그림 도구로 오늘 배운 4단계 파이프라인을 스스로 다시 그려보기</a:t>
             </a:r>
@@ -5291,6 +5313,8 @@
                   <a:srgbClr val="0D9488"/>
                 </a:solidFill>
                 <a:latin typeface="맑은 고딕"/>
+                <a:ea typeface="맑은 고딕"/>
+                <a:cs typeface="맑은 고딕"/>
               </a:rPr>
               <a:t>●  </a:t>
             </a:r>
@@ -5300,6 +5324,8 @@
                   <a:srgbClr val="222733"/>
                 </a:solidFill>
                 <a:latin typeface="맑은 고딕"/>
+                <a:ea typeface="맑은 고딕"/>
+                <a:cs typeface="맑은 고딕"/>
               </a:rPr>
               <a:t>각 단계에서 어떤 명령어가 실행될지 미리 메모해보기(다음 2차시에 실제로 작성)</a:t>
             </a:r>
@@ -5335,6 +5361,8 @@
                   <a:srgbClr val="5B6373"/>
                 </a:solidFill>
                 <a:latin typeface="맑은 고딕"/>
+                <a:ea typeface="맑은 고딕"/>
+                <a:cs typeface="맑은 고딕"/>
               </a:rPr>
               <a:t>클라우드인프라관리  ·  13주차 1차시 [VM 전용]</a:t>
             </a:r>
@@ -5370,6 +5398,8 @@
                   <a:srgbClr val="5B6373"/>
                 </a:solidFill>
                 <a:latin typeface="맑은 고딕"/>
+                <a:ea typeface="맑은 고딕"/>
+                <a:cs typeface="맑은 고딕"/>
               </a:rPr>
               <a:t>10 / 13</a:t>
             </a:r>
@@ -5573,6 +5603,8 @@
                   <a:srgbClr val="14213D"/>
                 </a:solidFill>
                 <a:latin typeface="맑은 고딕"/>
+                <a:ea typeface="맑은 고딕"/>
+                <a:cs typeface="맑은 고딕"/>
               </a:rPr>
               <a:t>03</a:t>
             </a:r>
@@ -5608,6 +5640,8 @@
                   <a:srgbClr val="14B8A6"/>
                 </a:solidFill>
                 <a:latin typeface="맑은 고딕"/>
+                <a:ea typeface="맑은 고딕"/>
+                <a:cs typeface="맑은 고딕"/>
               </a:rPr>
               <a:t>실습 안내</a:t>
             </a:r>
@@ -5643,6 +5677,8 @@
                   <a:srgbClr val="FFFFFF"/>
                 </a:solidFill>
                 <a:latin typeface="맑은 고딕"/>
+                <a:ea typeface="맑은 고딕"/>
+                <a:cs typeface="맑은 고딕"/>
               </a:rPr>
               <a:t>결과 정리 및 제출</a:t>
             </a:r>
@@ -5682,6 +5718,8 @@
                   <a:srgbClr val="0D9488"/>
                 </a:solidFill>
                 <a:latin typeface="맑은 고딕"/>
+                <a:ea typeface="맑은 고딕"/>
+                <a:cs typeface="맑은 고딕"/>
               </a:rPr>
               <a:t>●  </a:t>
             </a:r>
@@ -5691,6 +5729,8 @@
                   <a:srgbClr val="222733"/>
                 </a:solidFill>
                 <a:latin typeface="맑은 고딕"/>
+                <a:ea typeface="맑은 고딕"/>
+                <a:cs typeface="맑은 고딕"/>
               </a:rPr>
               <a:t>직접 그린 파이프라인 흐름도 캡처(사진 또는 스캔) 제출</a:t>
             </a:r>
@@ -5707,6 +5747,8 @@
                   <a:srgbClr val="0D9488"/>
                 </a:solidFill>
                 <a:latin typeface="맑은 고딕"/>
+                <a:ea typeface="맑은 고딕"/>
+                <a:cs typeface="맑은 고딕"/>
               </a:rPr>
               <a:t>●  </a:t>
             </a:r>
@@ -5716,6 +5758,8 @@
                   <a:srgbClr val="222733"/>
                 </a:solidFill>
                 <a:latin typeface="맑은 고딕"/>
+                <a:ea typeface="맑은 고딕"/>
+                <a:cs typeface="맑은 고딕"/>
               </a:rPr>
               <a:t>챗봇 뼈대 코드 구조를 훑어본 소감 3줄 이상 작성</a:t>
             </a:r>
@@ -5732,6 +5776,8 @@
                   <a:srgbClr val="0D9488"/>
                 </a:solidFill>
                 <a:latin typeface="맑은 고딕"/>
+                <a:ea typeface="맑은 고딕"/>
+                <a:cs typeface="맑은 고딕"/>
               </a:rPr>
               <a:t>●  </a:t>
             </a:r>
@@ -5741,6 +5787,8 @@
                   <a:srgbClr val="222733"/>
                 </a:solidFill>
                 <a:latin typeface="맑은 고딕"/>
+                <a:ea typeface="맑은 고딕"/>
+                <a:cs typeface="맑은 고딕"/>
               </a:rPr>
               <a:t>다음 2차시부터 본격적인 구축이 시작되니, 11~12주차 Jenkinsfile 문법을 한 번 복습해오기</a:t>
             </a:r>
@@ -5776,6 +5824,8 @@
                   <a:srgbClr val="5B6373"/>
                 </a:solidFill>
                 <a:latin typeface="맑은 고딕"/>
+                <a:ea typeface="맑은 고딕"/>
+                <a:cs typeface="맑은 고딕"/>
               </a:rPr>
               <a:t>클라우드인프라관리  ·  13주차 1차시 [VM 전용]</a:t>
             </a:r>
@@ -5811,6 +5861,8 @@
                   <a:srgbClr val="5B6373"/>
                 </a:solidFill>
                 <a:latin typeface="맑은 고딕"/>
+                <a:ea typeface="맑은 고딕"/>
+                <a:cs typeface="맑은 고딕"/>
               </a:rPr>
               <a:t>11 / 13</a:t>
             </a:r>
@@ -5996,6 +6048,8 @@
                   <a:srgbClr val="FFFFFF"/>
                 </a:solidFill>
                 <a:latin typeface="맑은 고딕"/>
+                <a:ea typeface="맑은 고딕"/>
+                <a:cs typeface="맑은 고딕"/>
               </a:rPr>
               <a:t>오늘의 정리</a:t>
             </a:r>
@@ -6049,6 +6103,8 @@
                   <a:srgbClr val="14213D"/>
                 </a:solidFill>
                 <a:latin typeface="맑은 고딕"/>
+                <a:ea typeface="맑은 고딕"/>
+                <a:cs typeface="맑은 고딕"/>
               </a:rPr>
               <a:t>1</a:t>
             </a:r>
@@ -6084,6 +6140,8 @@
                   <a:srgbClr val="FFFFFF"/>
                 </a:solidFill>
                 <a:latin typeface="맑은 고딕"/>
+                <a:ea typeface="맑은 고딕"/>
+                <a:cs typeface="맑은 고딕"/>
               </a:rPr>
               <a:t>13~14주차는 시간 제약 없는 100% VM 전용 실습이다</a:t>
             </a:r>
@@ -6137,6 +6195,8 @@
                   <a:srgbClr val="14213D"/>
                 </a:solidFill>
                 <a:latin typeface="맑은 고딕"/>
+                <a:ea typeface="맑은 고딕"/>
+                <a:cs typeface="맑은 고딕"/>
               </a:rPr>
               <a:t>2</a:t>
             </a:r>
@@ -6172,6 +6232,8 @@
                   <a:srgbClr val="FFFFFF"/>
                 </a:solidFill>
                 <a:latin typeface="맑은 고딕"/>
+                <a:ea typeface="맑은 고딕"/>
+                <a:cs typeface="맑은 고딕"/>
               </a:rPr>
               <a:t>Git·Docker·Jenkins·K8s가 각자의 역할로 하나의 자동 배포 파이프라인을 이룬다</a:t>
             </a:r>
@@ -6313,6 +6375,8 @@
                   <a:srgbClr val="FFFFFF"/>
                 </a:solidFill>
                 <a:latin typeface="맑은 고딕"/>
+                <a:ea typeface="맑은 고딕"/>
+                <a:cs typeface="맑은 고딕"/>
               </a:rPr>
               <a:t>다음 차시 예고</a:t>
             </a:r>
@@ -6348,6 +6412,8 @@
                   <a:srgbClr val="14B8A6"/>
                 </a:solidFill>
                 <a:latin typeface="맑은 고딕"/>
+                <a:ea typeface="맑은 고딕"/>
+                <a:cs typeface="맑은 고딕"/>
               </a:rPr>
               <a:t>다음 차시 예고 — 13주차 2차시</a:t>
             </a:r>
@@ -6383,6 +6449,8 @@
                   <a:srgbClr val="FFFFFF"/>
                 </a:solidFill>
                 <a:latin typeface="맑은 고딕"/>
+                <a:ea typeface="맑은 고딕"/>
+                <a:cs typeface="맑은 고딕"/>
               </a:rPr>
               <a:t>오늘 그려본 흐름도를 실제로 구현합니다. Jenkinsfile에 Build·Push·Deploy 단계를 채워 넣어 실제 파이프라인을 구축합니다.</a:t>
             </a:r>
@@ -6524,6 +6592,8 @@
                   <a:srgbClr val="14B8A6"/>
                 </a:solidFill>
                 <a:latin typeface="맑은 고딕"/>
+                <a:ea typeface="맑은 고딕"/>
+                <a:cs typeface="맑은 고딕"/>
               </a:rPr>
               <a:t>SESSION OVERVIEW</a:t>
             </a:r>
@@ -6559,6 +6629,8 @@
                   <a:srgbClr val="FFFFFF"/>
                 </a:solidFill>
                 <a:latin typeface="맑은 고딕"/>
+                <a:ea typeface="맑은 고딕"/>
+                <a:cs typeface="맑은 고딕"/>
               </a:rPr>
               <a:t>오늘의 학습 목표</a:t>
             </a:r>
@@ -6598,6 +6670,8 @@
                   <a:srgbClr val="222733"/>
                 </a:solidFill>
                 <a:latin typeface="맑은 고딕"/>
+                <a:ea typeface="맑은 고딕"/>
+                <a:cs typeface="맑은 고딕"/>
               </a:rPr>
               <a:t>1.  13~14주차 실습 미션(AI 챗봇 자동 배포)의 전체 그림을 이해한다</a:t>
             </a:r>
@@ -6614,6 +6688,8 @@
                   <a:srgbClr val="222733"/>
                 </a:solidFill>
                 <a:latin typeface="맑은 고딕"/>
+                <a:ea typeface="맑은 고딕"/>
+                <a:cs typeface="맑은 고딕"/>
               </a:rPr>
               <a:t>2.  Git·Docker·Jenkins·K8s가 파이프라인에서 각각 어떤 역할을 맡는지 정리한다</a:t>
             </a:r>
@@ -6630,6 +6706,8 @@
                   <a:srgbClr val="222733"/>
                 </a:solidFill>
                 <a:latin typeface="맑은 고딕"/>
+                <a:ea typeface="맑은 고딕"/>
+                <a:cs typeface="맑은 고딕"/>
               </a:rPr>
               <a:t>3.  직접 전체 흐름도를 그려보며 다음 실습에서 무엇을 만들지 예습한다</a:t>
             </a:r>
@@ -6665,6 +6743,8 @@
                   <a:srgbClr val="5B6373"/>
                 </a:solidFill>
                 <a:latin typeface="맑은 고딕"/>
+                <a:ea typeface="맑은 고딕"/>
+                <a:cs typeface="맑은 고딕"/>
               </a:rPr>
               <a:t>클라우드인프라관리  ·  13주차 1차시 [VM 전용]</a:t>
             </a:r>
@@ -6700,6 +6780,8 @@
                   <a:srgbClr val="5B6373"/>
                 </a:solidFill>
                 <a:latin typeface="맑은 고딕"/>
+                <a:ea typeface="맑은 고딕"/>
+                <a:cs typeface="맑은 고딕"/>
               </a:rPr>
               <a:t>02 / 13</a:t>
             </a:r>
@@ -6885,6 +6967,8 @@
                   <a:srgbClr val="14B8A6"/>
                 </a:solidFill>
                 <a:latin typeface="맑은 고딕"/>
+                <a:ea typeface="맑은 고딕"/>
+                <a:cs typeface="맑은 고딕"/>
               </a:rPr>
               <a:t>SESSION OVERVIEW</a:t>
             </a:r>
@@ -6920,6 +7004,8 @@
                   <a:srgbClr val="FFFFFF"/>
                 </a:solidFill>
                 <a:latin typeface="맑은 고딕"/>
+                <a:ea typeface="맑은 고딕"/>
+                <a:cs typeface="맑은 고딕"/>
               </a:rPr>
               <a:t>오늘의 진행 순서 (Killercoda 없음)</a:t>
             </a:r>
@@ -7087,6 +7173,8 @@
                   <a:srgbClr val="FFFFFF"/>
                 </a:solidFill>
                 <a:latin typeface="맑은 고딕"/>
+                <a:ea typeface="맑은 고딕"/>
+                <a:cs typeface="맑은 고딕"/>
               </a:rPr>
               <a:t>1</a:t>
             </a:r>
@@ -7170,6 +7258,8 @@
                   <a:srgbClr val="14213D"/>
                 </a:solidFill>
                 <a:latin typeface="맑은 고딕"/>
+                <a:ea typeface="맑은 고딕"/>
+                <a:cs typeface="맑은 고딕"/>
               </a:rPr>
               <a:t>개념 설명</a:t>
             </a:r>
@@ -7209,6 +7299,8 @@
                   <a:srgbClr val="222733"/>
                 </a:solidFill>
                 <a:latin typeface="맑은 고딕"/>
+                <a:ea typeface="맑은 고딕"/>
+                <a:cs typeface="맑은 고딕"/>
               </a:rPr>
               <a:t>미션 소개+아키텍처 복습</a:t>
             </a:r>
@@ -7288,6 +7380,8 @@
                   <a:srgbClr val="FFFFFF"/>
                 </a:solidFill>
                 <a:latin typeface="맑은 고딕"/>
+                <a:ea typeface="맑은 고딕"/>
+                <a:cs typeface="맑은 고딕"/>
               </a:rPr>
               <a:t>2</a:t>
             </a:r>
@@ -7371,6 +7465,8 @@
                   <a:srgbClr val="14213D"/>
                 </a:solidFill>
                 <a:latin typeface="맑은 고딕"/>
+                <a:ea typeface="맑은 고딕"/>
+                <a:cs typeface="맑은 고딕"/>
               </a:rPr>
               <a:t>VM 실습</a:t>
             </a:r>
@@ -7410,6 +7506,8 @@
                   <a:srgbClr val="222733"/>
                 </a:solidFill>
                 <a:latin typeface="맑은 고딕"/>
+                <a:ea typeface="맑은 고딕"/>
+                <a:cs typeface="맑은 고딕"/>
               </a:rPr>
               <a:t>챗봇 코드 확인+흐름도 그리기</a:t>
             </a:r>
@@ -7489,6 +7587,8 @@
                   <a:srgbClr val="FFFFFF"/>
                 </a:solidFill>
                 <a:latin typeface="맑은 고딕"/>
+                <a:ea typeface="맑은 고딕"/>
+                <a:cs typeface="맑은 고딕"/>
               </a:rPr>
               <a:t>3</a:t>
             </a:r>
@@ -7572,6 +7672,8 @@
                   <a:srgbClr val="14213D"/>
                 </a:solidFill>
                 <a:latin typeface="맑은 고딕"/>
+                <a:ea typeface="맑은 고딕"/>
+                <a:cs typeface="맑은 고딕"/>
               </a:rPr>
               <a:t>결과 정리</a:t>
             </a:r>
@@ -7611,6 +7713,8 @@
                   <a:srgbClr val="222733"/>
                 </a:solidFill>
                 <a:latin typeface="맑은 고딕"/>
+                <a:ea typeface="맑은 고딕"/>
+                <a:cs typeface="맑은 고딕"/>
               </a:rPr>
               <a:t>제출 안내</a:t>
             </a:r>
@@ -7646,6 +7750,8 @@
                   <a:srgbClr val="5B6373"/>
                 </a:solidFill>
                 <a:latin typeface="맑은 고딕"/>
+                <a:ea typeface="맑은 고딕"/>
+                <a:cs typeface="맑은 고딕"/>
               </a:rPr>
               <a:t>클라우드인프라관리  ·  13주차 1차시 [VM 전용]</a:t>
             </a:r>
@@ -7681,6 +7787,8 @@
                   <a:srgbClr val="5B6373"/>
                 </a:solidFill>
                 <a:latin typeface="맑은 고딕"/>
+                <a:ea typeface="맑은 고딕"/>
+                <a:cs typeface="맑은 고딕"/>
               </a:rPr>
               <a:t>03 / 13</a:t>
             </a:r>
@@ -7884,6 +7992,8 @@
                   <a:srgbClr val="14213D"/>
                 </a:solidFill>
                 <a:latin typeface="맑은 고딕"/>
+                <a:ea typeface="맑은 고딕"/>
+                <a:cs typeface="맑은 고딕"/>
               </a:rPr>
               <a:t>PART 00</a:t>
             </a:r>
@@ -7919,6 +8029,8 @@
                   <a:srgbClr val="FFFFFF"/>
                 </a:solidFill>
                 <a:latin typeface="맑은 고딕"/>
+                <a:ea typeface="맑은 고딕"/>
+                <a:cs typeface="맑은 고딕"/>
               </a:rPr>
               <a:t>13~14주차는 다릅니다</a:t>
             </a:r>
@@ -7954,6 +8066,8 @@
                   <a:srgbClr val="C9D3E6"/>
                 </a:solidFill>
                 <a:latin typeface="맑은 고딕"/>
+                <a:ea typeface="맑은 고딕"/>
+                <a:cs typeface="맑은 고딕"/>
               </a:rPr>
               <a:t>100% 로컬 VM 전용 실습</a:t>
             </a:r>
@@ -8113,6 +8227,8 @@
                   <a:srgbClr val="14213D"/>
                 </a:solidFill>
                 <a:latin typeface="맑은 고딕"/>
+                <a:ea typeface="맑은 고딕"/>
+                <a:cs typeface="맑은 고딕"/>
               </a:rPr>
               <a:t>00</a:t>
             </a:r>
@@ -8148,6 +8264,8 @@
                   <a:srgbClr val="14B8A6"/>
                 </a:solidFill>
                 <a:latin typeface="맑은 고딕"/>
+                <a:ea typeface="맑은 고딕"/>
+                <a:cs typeface="맑은 고딕"/>
               </a:rPr>
               <a:t>PART 0 · 실습 안내</a:t>
             </a:r>
@@ -8183,6 +8301,8 @@
                   <a:srgbClr val="FFFFFF"/>
                 </a:solidFill>
                 <a:latin typeface="맑은 고딕"/>
+                <a:ea typeface="맑은 고딕"/>
+                <a:cs typeface="맑은 고딕"/>
               </a:rPr>
               <a:t>왜 오늘부터 Killercoda가 없을까</a:t>
             </a:r>
@@ -8222,6 +8342,8 @@
                   <a:srgbClr val="0D9488"/>
                 </a:solidFill>
                 <a:latin typeface="맑은 고딕"/>
+                <a:ea typeface="맑은 고딕"/>
+                <a:cs typeface="맑은 고딕"/>
               </a:rPr>
               <a:t>●  </a:t>
             </a:r>
@@ -8231,6 +8353,8 @@
                   <a:srgbClr val="222733"/>
                 </a:solidFill>
                 <a:latin typeface="맑은 고딕"/>
+                <a:ea typeface="맑은 고딕"/>
+                <a:cs typeface="맑은 고딕"/>
               </a:rPr>
               <a:t>Killercoda는 60분 시간 제한이 있어, 복잡한 파이프라인 디버깅에는 부적합함</a:t>
             </a:r>
@@ -8247,6 +8371,8 @@
                   <a:srgbClr val="0D9488"/>
                 </a:solidFill>
                 <a:latin typeface="맑은 고딕"/>
+                <a:ea typeface="맑은 고딕"/>
+                <a:cs typeface="맑은 고딕"/>
               </a:rPr>
               <a:t>●  </a:t>
             </a:r>
@@ -8256,6 +8382,8 @@
                   <a:srgbClr val="222733"/>
                 </a:solidFill>
                 <a:latin typeface="맑은 고딕"/>
+                <a:ea typeface="맑은 고딕"/>
+                <a:cs typeface="맑은 고딕"/>
               </a:rPr>
               <a:t>13~14주차는 에러 추적·트러블슈팅에 시간이 걸릴 수 있는 대통합 실습 구간</a:t>
             </a:r>
@@ -8272,6 +8400,8 @@
                   <a:srgbClr val="0D9488"/>
                 </a:solidFill>
                 <a:latin typeface="맑은 고딕"/>
+                <a:ea typeface="맑은 고딕"/>
+                <a:cs typeface="맑은 고딕"/>
               </a:rPr>
               <a:t>●  </a:t>
             </a:r>
@@ -8281,6 +8411,8 @@
                   <a:srgbClr val="222733"/>
                 </a:solidFill>
                 <a:latin typeface="맑은 고딕"/>
+                <a:ea typeface="맑은 고딕"/>
+                <a:cs typeface="맑은 고딕"/>
               </a:rPr>
               <a:t>그래서 100% 학생 개인 VM 안에서만, 시간 제약 없이 진행합니다</a:t>
             </a:r>
@@ -8360,6 +8492,8 @@
                   <a:srgbClr val="FFFFFF"/>
                 </a:solidFill>
                 <a:latin typeface="맑은 고딕"/>
+                <a:ea typeface="맑은 고딕"/>
+                <a:cs typeface="맑은 고딕"/>
               </a:rPr>
               <a:t>🎯  13~14주차 미션</a:t>
             </a:r>
@@ -8395,6 +8529,8 @@
                   <a:srgbClr val="FFFFFF"/>
                 </a:solidFill>
                 <a:latin typeface="맑은 고딕"/>
+                <a:ea typeface="맑은 고딕"/>
+                <a:cs typeface="맑은 고딕"/>
               </a:rPr>
               <a:t>AI 미니 챗봇 웹 앱을 Git→Jenkins→Docker Hub→K8s로 완전 자동 배포하고, 부하까지 견디게 만든다</a:t>
             </a:r>
@@ -8430,6 +8566,8 @@
                   <a:srgbClr val="5B6373"/>
                 </a:solidFill>
                 <a:latin typeface="맑은 고딕"/>
+                <a:ea typeface="맑은 고딕"/>
+                <a:cs typeface="맑은 고딕"/>
               </a:rPr>
               <a:t>클라우드인프라관리  ·  13주차 1차시 [VM 전용]</a:t>
             </a:r>
@@ -8465,6 +8603,8 @@
                   <a:srgbClr val="5B6373"/>
                 </a:solidFill>
                 <a:latin typeface="맑은 고딕"/>
+                <a:ea typeface="맑은 고딕"/>
+                <a:cs typeface="맑은 고딕"/>
               </a:rPr>
               <a:t>05 / 13</a:t>
             </a:r>
@@ -8668,6 +8808,8 @@
                   <a:srgbClr val="14213D"/>
                 </a:solidFill>
                 <a:latin typeface="맑은 고딕"/>
+                <a:ea typeface="맑은 고딕"/>
+                <a:cs typeface="맑은 고딕"/>
               </a:rPr>
               <a:t>PART 01</a:t>
             </a:r>
@@ -8703,6 +8845,8 @@
                   <a:srgbClr val="FFFFFF"/>
                 </a:solidFill>
                 <a:latin typeface="맑은 고딕"/>
+                <a:ea typeface="맑은 고딕"/>
+                <a:cs typeface="맑은 고딕"/>
               </a:rPr>
               <a:t>전체 아키텍처</a:t>
             </a:r>
@@ -8738,6 +8882,8 @@
                   <a:srgbClr val="C9D3E6"/>
                 </a:solidFill>
                 <a:latin typeface="맑은 고딕"/>
+                <a:ea typeface="맑은 고딕"/>
+                <a:cs typeface="맑은 고딕"/>
               </a:rPr>
               <a:t>학생 PC 소스 수정 → 자동으로 서비스에 반영</a:t>
             </a:r>
@@ -8897,6 +9043,8 @@
                   <a:srgbClr val="14213D"/>
                 </a:solidFill>
                 <a:latin typeface="맑은 고딕"/>
+                <a:ea typeface="맑은 고딕"/>
+                <a:cs typeface="맑은 고딕"/>
               </a:rPr>
               <a:t>01</a:t>
             </a:r>
@@ -8932,6 +9080,8 @@
                   <a:srgbClr val="14B8A6"/>
                 </a:solidFill>
                 <a:latin typeface="맑은 고딕"/>
+                <a:ea typeface="맑은 고딕"/>
+                <a:cs typeface="맑은 고딕"/>
               </a:rPr>
               <a:t>PART 1 · 전체 아키텍처</a:t>
             </a:r>
@@ -8967,6 +9117,8 @@
                   <a:srgbClr val="FFFFFF"/>
                 </a:solidFill>
                 <a:latin typeface="맑은 고딕"/>
+                <a:ea typeface="맑은 고딕"/>
+                <a:cs typeface="맑은 고딕"/>
               </a:rPr>
               <a:t>13주차에 완성할 파이프라인</a:t>
             </a:r>
@@ -9006,6 +9158,8 @@
                   <a:srgbClr val="0D9488"/>
                 </a:solidFill>
                 <a:latin typeface="맑은 고딕"/>
+                <a:ea typeface="맑은 고딕"/>
+                <a:cs typeface="맑은 고딕"/>
               </a:rPr>
               <a:t>●  </a:t>
             </a:r>
@@ -9015,6 +9169,8 @@
                   <a:srgbClr val="222733"/>
                 </a:solidFill>
                 <a:latin typeface="맑은 고딕"/>
+                <a:ea typeface="맑은 고딕"/>
+                <a:cs typeface="맑은 고딕"/>
               </a:rPr>
               <a:t>학생 PC 에디터에서 소스 수정 → git push origin main</a:t>
             </a:r>
@@ -9031,6 +9187,8 @@
                   <a:srgbClr val="0D9488"/>
                 </a:solidFill>
                 <a:latin typeface="맑은 고딕"/>
+                <a:ea typeface="맑은 고딕"/>
+                <a:cs typeface="맑은 고딕"/>
               </a:rPr>
               <a:t>●  </a:t>
             </a:r>
@@ -9040,6 +9198,8 @@
                   <a:srgbClr val="222733"/>
                 </a:solidFill>
                 <a:latin typeface="맑은 고딕"/>
+                <a:ea typeface="맑은 고딕"/>
+                <a:cs typeface="맑은 고딕"/>
               </a:rPr>
               <a:t>로컬 VM Jenkins가 Poll SCM(매 1분)으로 변경 감지</a:t>
             </a:r>
@@ -9056,6 +9216,8 @@
                   <a:srgbClr val="0D9488"/>
                 </a:solidFill>
                 <a:latin typeface="맑은 고딕"/>
+                <a:ea typeface="맑은 고딕"/>
+                <a:cs typeface="맑은 고딕"/>
               </a:rPr>
               <a:t>●  </a:t>
             </a:r>
@@ -9065,6 +9227,8 @@
                   <a:srgbClr val="222733"/>
                 </a:solidFill>
                 <a:latin typeface="맑은 고딕"/>
+                <a:ea typeface="맑은 고딕"/>
+                <a:cs typeface="맑은 고딕"/>
               </a:rPr>
               <a:t>Jenkins가 Docker 이미지 빌드 &amp; Docker Hub Push</a:t>
             </a:r>
@@ -9081,6 +9245,8 @@
                   <a:srgbClr val="0D9488"/>
                 </a:solidFill>
                 <a:latin typeface="맑은 고딕"/>
+                <a:ea typeface="맑은 고딕"/>
+                <a:cs typeface="맑은 고딕"/>
               </a:rPr>
               <a:t>●  </a:t>
             </a:r>
@@ -9090,6 +9256,8 @@
                   <a:srgbClr val="222733"/>
                 </a:solidFill>
                 <a:latin typeface="맑은 고딕"/>
+                <a:ea typeface="맑은 고딕"/>
+                <a:cs typeface="맑은 고딕"/>
               </a:rPr>
               <a:t>Jenkins가 minikube의 Deployment 이미지를 새 버전으로 교체(Rolling Update)</a:t>
             </a:r>
@@ -9125,6 +9293,8 @@
                   <a:srgbClr val="14213D"/>
                 </a:solidFill>
                 <a:latin typeface="맑은 고딕"/>
+                <a:ea typeface="맑은 고딕"/>
+                <a:cs typeface="맑은 고딕"/>
               </a:rPr>
               <a:t>Git → Jenkins → Docker Hub → K8s</a:t>
             </a:r>
@@ -9204,6 +9374,8 @@
                   <a:srgbClr val="FFFFFF"/>
                 </a:solidFill>
                 <a:latin typeface="맑은 고딕"/>
+                <a:ea typeface="맑은 고딕"/>
+                <a:cs typeface="맑은 고딕"/>
               </a:rPr>
               <a:t>학생 PC(소스 수정)</a:t>
             </a:r>
@@ -9283,6 +9455,8 @@
                   <a:srgbClr val="FFFFFF"/>
                 </a:solidFill>
                 <a:latin typeface="맑은 고딕"/>
+                <a:ea typeface="맑은 고딕"/>
+                <a:cs typeface="맑은 고딕"/>
               </a:rPr>
               <a:t>GitHub(버전관리)</a:t>
             </a:r>
@@ -9362,6 +9536,8 @@
                   <a:srgbClr val="FFFFFF"/>
                 </a:solidFill>
                 <a:latin typeface="맑은 고딕"/>
+                <a:ea typeface="맑은 고딕"/>
+                <a:cs typeface="맑은 고딕"/>
               </a:rPr>
               <a:t>Jenkins(빌드+Push)</a:t>
             </a:r>
@@ -9441,6 +9617,8 @@
                   <a:srgbClr val="FFFFFF"/>
                 </a:solidFill>
                 <a:latin typeface="맑은 고딕"/>
+                <a:ea typeface="맑은 고딕"/>
+                <a:cs typeface="맑은 고딕"/>
               </a:rPr>
               <a:t>Minikube(자동 배포)</a:t>
             </a:r>
@@ -9476,6 +9654,8 @@
                   <a:srgbClr val="5B6373"/>
                 </a:solidFill>
                 <a:latin typeface="맑은 고딕"/>
+                <a:ea typeface="맑은 고딕"/>
+                <a:cs typeface="맑은 고딕"/>
               </a:rPr>
               <a:t>클라우드인프라관리  ·  13주차 1차시 [VM 전용]</a:t>
             </a:r>
@@ -9511,6 +9691,8 @@
                   <a:srgbClr val="5B6373"/>
                 </a:solidFill>
                 <a:latin typeface="맑은 고딕"/>
+                <a:ea typeface="맑은 고딕"/>
+                <a:cs typeface="맑은 고딕"/>
               </a:rPr>
               <a:t>07 / 13</a:t>
             </a:r>
@@ -9714,6 +9896,8 @@
                   <a:srgbClr val="14213D"/>
                 </a:solidFill>
                 <a:latin typeface="맑은 고딕"/>
+                <a:ea typeface="맑은 고딕"/>
+                <a:cs typeface="맑은 고딕"/>
               </a:rPr>
               <a:t>01</a:t>
             </a:r>
@@ -9749,6 +9933,8 @@
                   <a:srgbClr val="14B8A6"/>
                 </a:solidFill>
                 <a:latin typeface="맑은 고딕"/>
+                <a:ea typeface="맑은 고딕"/>
+                <a:cs typeface="맑은 고딕"/>
               </a:rPr>
               <a:t>PART 1 · 전체 아키텍처</a:t>
             </a:r>
@@ -9784,6 +9970,8 @@
                   <a:srgbClr val="FFFFFF"/>
                 </a:solidFill>
                 <a:latin typeface="맑은 고딕"/>
+                <a:ea typeface="맑은 고딕"/>
+                <a:cs typeface="맑은 고딕"/>
               </a:rPr>
               <a:t>각 도구가 맡는 역할 한 줄 정리</a:t>
             </a:r>
@@ -9823,6 +10011,8 @@
                   <a:srgbClr val="0D9488"/>
                 </a:solidFill>
                 <a:latin typeface="맑은 고딕"/>
+                <a:ea typeface="맑은 고딕"/>
+                <a:cs typeface="맑은 고딕"/>
               </a:rPr>
               <a:t>●  </a:t>
             </a:r>
@@ -9832,6 +10022,8 @@
                   <a:srgbClr val="222733"/>
                 </a:solidFill>
                 <a:latin typeface="맑은 고딕"/>
+                <a:ea typeface="맑은 고딕"/>
+                <a:cs typeface="맑은 고딕"/>
               </a:rPr>
               <a:t>Git/GitHub(9~10주차 연결) — 소스 코드의 버전을 기록하고 변경을 공유</a:t>
             </a:r>
@@ -9848,6 +10040,8 @@
                   <a:srgbClr val="0D9488"/>
                 </a:solidFill>
                 <a:latin typeface="맑은 고딕"/>
+                <a:ea typeface="맑은 고딕"/>
+                <a:cs typeface="맑은 고딕"/>
               </a:rPr>
               <a:t>●  </a:t>
             </a:r>
@@ -9857,6 +10051,8 @@
                   <a:srgbClr val="222733"/>
                 </a:solidFill>
                 <a:latin typeface="맑은 고딕"/>
+                <a:ea typeface="맑은 고딕"/>
+                <a:cs typeface="맑은 고딕"/>
               </a:rPr>
               <a:t>Docker(1~3주차 연결) — 챗봇 앱을 이미지로 포장해 어디서든 동일하게 실행</a:t>
             </a:r>
@@ -9873,6 +10069,8 @@
                   <a:srgbClr val="0D9488"/>
                 </a:solidFill>
                 <a:latin typeface="맑은 고딕"/>
+                <a:ea typeface="맑은 고딕"/>
+                <a:cs typeface="맑은 고딕"/>
               </a:rPr>
               <a:t>●  </a:t>
             </a:r>
@@ -9882,6 +10080,8 @@
                   <a:srgbClr val="222733"/>
                 </a:solidFill>
                 <a:latin typeface="맑은 고딕"/>
+                <a:ea typeface="맑은 고딕"/>
+                <a:cs typeface="맑은 고딕"/>
               </a:rPr>
               <a:t>Jenkins(11~12주차 연결) — 코드 변경을 감지해 빌드·배포를 자동으로 실행</a:t>
             </a:r>
@@ -9898,6 +10098,8 @@
                   <a:srgbClr val="0D9488"/>
                 </a:solidFill>
                 <a:latin typeface="맑은 고딕"/>
+                <a:ea typeface="맑은 고딕"/>
+                <a:cs typeface="맑은 고딕"/>
               </a:rPr>
               <a:t>●  </a:t>
             </a:r>
@@ -9907,6 +10109,8 @@
                   <a:srgbClr val="222733"/>
                 </a:solidFill>
                 <a:latin typeface="맑은 고딕"/>
+                <a:ea typeface="맑은 고딕"/>
+                <a:cs typeface="맑은 고딕"/>
               </a:rPr>
               <a:t>Kubernetes(4~7주차 연결) — 실제로 챗봇 컨테이너를 운영하고 무중단으로 교체</a:t>
             </a:r>
@@ -9942,6 +10146,8 @@
                   <a:srgbClr val="5B6373"/>
                 </a:solidFill>
                 <a:latin typeface="맑은 고딕"/>
+                <a:ea typeface="맑은 고딕"/>
+                <a:cs typeface="맑은 고딕"/>
               </a:rPr>
               <a:t>클라우드인프라관리  ·  13주차 1차시 [VM 전용]</a:t>
             </a:r>
@@ -9977,6 +10183,8 @@
                   <a:srgbClr val="5B6373"/>
                 </a:solidFill>
                 <a:latin typeface="맑은 고딕"/>
+                <a:ea typeface="맑은 고딕"/>
+                <a:cs typeface="맑은 고딕"/>
               </a:rPr>
               <a:t>08 / 13</a:t>
             </a:r>
@@ -10180,6 +10388,8 @@
                   <a:srgbClr val="14213D"/>
                 </a:solidFill>
                 <a:latin typeface="맑은 고딕"/>
+                <a:ea typeface="맑은 고딕"/>
+                <a:cs typeface="맑은 고딕"/>
               </a:rPr>
               <a:t>01</a:t>
             </a:r>
@@ -10215,6 +10425,8 @@
                   <a:srgbClr val="14B8A6"/>
                 </a:solidFill>
                 <a:latin typeface="맑은 고딕"/>
+                <a:ea typeface="맑은 고딕"/>
+                <a:cs typeface="맑은 고딕"/>
               </a:rPr>
               <a:t>PART 1 · 전체 아키텍처</a:t>
             </a:r>
@@ -10250,6 +10462,8 @@
                   <a:srgbClr val="FFFFFF"/>
                 </a:solidFill>
                 <a:latin typeface="맑은 고딕"/>
+                <a:ea typeface="맑은 고딕"/>
+                <a:cs typeface="맑은 고딕"/>
               </a:rPr>
               <a:t>미니 챗봇이란?</a:t>
             </a:r>
@@ -10289,6 +10503,8 @@
                   <a:srgbClr val="0D9488"/>
                 </a:solidFill>
                 <a:latin typeface="맑은 고딕"/>
+                <a:ea typeface="맑은 고딕"/>
+                <a:cs typeface="맑은 고딕"/>
               </a:rPr>
               <a:t>●  </a:t>
             </a:r>
@@ -10298,6 +10514,8 @@
                   <a:srgbClr val="222733"/>
                 </a:solidFill>
                 <a:latin typeface="맑은 고딕"/>
+                <a:ea typeface="맑은 고딕"/>
+                <a:cs typeface="맑은 고딕"/>
               </a:rPr>
               <a:t>Flask로 만든 간단한 웹 앱 — 사용자 메시지에 규칙 기반으로 응답하는 미니 챗봇</a:t>
             </a:r>
@@ -10314,6 +10532,8 @@
                   <a:srgbClr val="0D9488"/>
                 </a:solidFill>
                 <a:latin typeface="맑은 고딕"/>
+                <a:ea typeface="맑은 고딕"/>
+                <a:cs typeface="맑은 고딕"/>
               </a:rPr>
               <a:t>●  </a:t>
             </a:r>
@@ -10323,6 +10543,8 @@
                   <a:srgbClr val="222733"/>
                 </a:solidFill>
                 <a:latin typeface="맑은 고딕"/>
+                <a:ea typeface="맑은 고딕"/>
+                <a:cs typeface="맑은 고딕"/>
               </a:rPr>
               <a:t>복잡한 AI 모델이 아니라, '파이프라인이 무엇을 배포하는지' 보여주는 실습용 앱</a:t>
             </a:r>
@@ -10339,6 +10561,8 @@
                   <a:srgbClr val="0D9488"/>
                 </a:solidFill>
                 <a:latin typeface="맑은 고딕"/>
+                <a:ea typeface="맑은 고딕"/>
+                <a:cs typeface="맑은 고딕"/>
               </a:rPr>
               <a:t>●  </a:t>
             </a:r>
@@ -10348,6 +10572,8 @@
                   <a:srgbClr val="222733"/>
                 </a:solidFill>
                 <a:latin typeface="맑은 고딕"/>
+                <a:ea typeface="맑은 고딕"/>
+                <a:cs typeface="맑은 고딕"/>
               </a:rPr>
               <a:t>핵심은 챗봇 자체가 아니라, 이 앱이 자동으로 빌드·배포·업데이트되는 전체 과정</a:t>
             </a:r>
@@ -10427,6 +10653,8 @@
                   <a:srgbClr val="FFFFFF"/>
                 </a:solidFill>
                 <a:latin typeface="맑은 고딕"/>
+                <a:ea typeface="맑은 고딕"/>
+                <a:cs typeface="맑은 고딕"/>
               </a:rPr>
               <a:t>📦  제공 자료</a:t>
             </a:r>
@@ -10462,6 +10690,8 @@
                   <a:srgbClr val="FFFFFF"/>
                 </a:solidFill>
                 <a:latin typeface="맑은 고딕"/>
+                <a:ea typeface="맑은 고딕"/>
+                <a:cs typeface="맑은 고딕"/>
               </a:rPr>
               <a:t>04_템플릿코드에 챗봇 뼈대 코드(app.py, Dockerfile, deployment.yaml)를 제공합니다</a:t>
             </a:r>
@@ -10497,6 +10727,8 @@
                   <a:srgbClr val="5B6373"/>
                 </a:solidFill>
                 <a:latin typeface="맑은 고딕"/>
+                <a:ea typeface="맑은 고딕"/>
+                <a:cs typeface="맑은 고딕"/>
               </a:rPr>
               <a:t>클라우드인프라관리  ·  13주차 1차시 [VM 전용]</a:t>
             </a:r>
@@ -10532,6 +10764,8 @@
                   <a:srgbClr val="5B6373"/>
                 </a:solidFill>
                 <a:latin typeface="맑은 고딕"/>
+                <a:ea typeface="맑은 고딕"/>
+                <a:cs typeface="맑은 고딕"/>
               </a:rPr>
               <a:t>09 / 13</a:t>
             </a:r>

--- a/class/cloud_infra_mgmt/13주차_통합실습1/01_강의자료/1차시_파이프라인아키텍처설계.pptx
+++ b/class/cloud_infra_mgmt/13주차_통합실습1/01_강의자료/1차시_파이프라인아키텍처설계.pptx
@@ -5258,18 +5258,7 @@
                 <a:ea typeface="맑은 고딕"/>
                 <a:cs typeface="맑은 고딕"/>
               </a:rPr>
-              <a:t>●  </a:t>
-            </a:r>
-            <a:r>
-              <a:rPr sz="1700" b="0">
-                <a:solidFill>
-                  <a:srgbClr val="222733"/>
-                </a:solidFill>
-                <a:latin typeface="맑은 고딕"/>
-                <a:ea typeface="맑은 고딕"/>
-                <a:cs typeface="맑은 고딕"/>
-              </a:rPr>
-              <a:t>04_템플릿코드의 챗봇 뼈대 코드를 VM에 내려받아 구조 파악(app.py, Dockerfile, deployment.yaml)</a:t>
+              <a:t>●  [슬라이드 09]의 코드로 app.py, Dockerfile, deployment.yaml을 개인 VM에 직접 작성</a:t>
             </a:r>
           </a:p>
           <a:p>
@@ -10693,7 +10682,133 @@
                 <a:ea typeface="맑은 고딕"/>
                 <a:cs typeface="맑은 고딕"/>
               </a:rPr>
-              <a:t>04_템플릿코드에 챗봇 뼈대 코드(app.py, Dockerfile, deployment.yaml)를 제공합니다</a:t>
+              <a:t>app.py (전체):</a:t>
+            </a:r>
+          </a:p>
+          <a:p>
+            <a:pPr algn="l"/>
+            <a:r>
+              <a:rPr sz="1300" b="0">
+                <a:solidFill>
+                  <a:srgbClr val="FFFFFF"/>
+                </a:solidFill>
+                <a:latin typeface="맑은 고딕"/>
+                <a:ea typeface="맑은 고딕"/>
+                <a:cs typeface="맑은 고딕"/>
+              </a:rPr>
+              <a:t>from flask import Flask</a:t>
+            </a:r>
+          </a:p>
+          <a:p>
+            <a:pPr algn="l"/>
+            <a:r>
+              <a:rPr sz="1300" b="0">
+                <a:solidFill>
+                  <a:srgbClr val="FFFFFF"/>
+                </a:solidFill>
+                <a:latin typeface="맑은 고딕"/>
+                <a:ea typeface="맑은 고딕"/>
+                <a:cs typeface="맑은 고딕"/>
+              </a:rPr>
+              <a:t>app = Flask(__name__)</a:t>
+            </a:r>
+          </a:p>
+          <a:p>
+            <a:pPr algn="l"/>
+            <a:r>
+              <a:rPr sz="1300" b="0">
+                <a:solidFill>
+                  <a:srgbClr val="FFFFFF"/>
+                </a:solidFill>
+                <a:latin typeface="맑은 고딕"/>
+                <a:ea typeface="맑은 고딕"/>
+                <a:cs typeface="맑은 고딕"/>
+              </a:rPr>
+              <a:t>@app.route("/")</a:t>
+            </a:r>
+          </a:p>
+          <a:p>
+            <a:pPr algn="l"/>
+            <a:r>
+              <a:rPr sz="1300" b="0">
+                <a:solidFill>
+                  <a:srgbClr val="FFFFFF"/>
+                </a:solidFill>
+                <a:latin typeface="맑은 고딕"/>
+                <a:ea typeface="맑은 고딕"/>
+                <a:cs typeface="맑은 고딕"/>
+              </a:rPr>
+              <a:t>def chat():</a:t>
+            </a:r>
+          </a:p>
+          <a:p>
+            <a:pPr algn="l"/>
+            <a:r>
+              <a:rPr sz="1300" b="0">
+                <a:solidFill>
+                  <a:srgbClr val="FFFFFF"/>
+                </a:solidFill>
+                <a:latin typeface="맑은 고딕"/>
+                <a:ea typeface="맑은 고딕"/>
+                <a:cs typeface="맑은 고딕"/>
+              </a:rPr>
+              <a:t>    return "안녕하세요! 저는 미니 챗봇입니다."</a:t>
+            </a:r>
+          </a:p>
+          <a:p>
+            <a:pPr algn="l"/>
+            <a:r>
+              <a:rPr sz="1300" b="0">
+                <a:solidFill>
+                  <a:srgbClr val="FFFFFF"/>
+                </a:solidFill>
+                <a:latin typeface="맑은 고딕"/>
+                <a:ea typeface="맑은 고딕"/>
+                <a:cs typeface="맑은 고딕"/>
+              </a:rPr>
+              <a:t>if __name__ == "__main__":</a:t>
+            </a:r>
+          </a:p>
+          <a:p>
+            <a:pPr algn="l"/>
+            <a:r>
+              <a:rPr sz="1300" b="0">
+                <a:solidFill>
+                  <a:srgbClr val="FFFFFF"/>
+                </a:solidFill>
+                <a:latin typeface="맑은 고딕"/>
+                <a:ea typeface="맑은 고딕"/>
+                <a:cs typeface="맑은 고딕"/>
+              </a:rPr>
+              <a:t>    app.run(host="0.0.0.0", port=5000)</a:t>
+            </a:r>
+          </a:p>
+          <a:p>
+            <a:pPr algn="l"/>
+            <a:r>
+              <a:rPr sz="1300" b="0">
+                <a:solidFill>
+                  <a:srgbClr val="FFFFFF"/>
+                </a:solidFill>
+                <a:latin typeface="맑은 고딕"/>
+                <a:ea typeface="맑은 고딕"/>
+                <a:cs typeface="맑은 고딕"/>
+              </a:rPr>
+              <a:t>Dockerfile (핵심): FROM python:3.11-slim → COPY app.py . → RUN pip install flask → CMD ["python","app.py"]</a:t>
+            </a:r>
+          </a:p>
+          <a:p>
+            <a:pPr algn="l"/>
+            <a:r>
+              <a:rPr sz="1300" b="0">
+                <a:solidFill>
+                  <a:srgbClr val="FFFFFF"/>
+                </a:solidFill>
+                <a:latin typeface="맑은 고딕"/>
+                <a:ea typeface="맑은 고딕"/>
+                <a:cs typeface="맑은 고딕"/>
+              </a:rPr>
+              <a:t>deployment.yaml (핵심): Deployment명 chatbot, 컨테이너명 web, Service명 chatbot(NodePort)</a:t>
             </a:r>
           </a:p>
         </p:txBody>
